--- a/assets/AB-NLOps-v3.pptx
+++ b/assets/AB-NLOps-v3.pptx
@@ -5,10 +5,10 @@
     <p:sldMasterId id="2147483648" r:id="rId4"/>
   </p:sldMasterIdLst>
   <p:notesMasterIdLst>
-    <p:notesMasterId r:id="rId21"/>
+    <p:notesMasterId r:id="rId22"/>
   </p:notesMasterIdLst>
   <p:handoutMasterIdLst>
-    <p:handoutMasterId r:id="rId22"/>
+    <p:handoutMasterId r:id="rId23"/>
   </p:handoutMasterIdLst>
   <p:sldIdLst>
     <p:sldId id="285" r:id="rId5"/>
@@ -26,13 +26,13 @@
     <p:sldId id="345" r:id="rId17"/>
     <p:sldId id="342" r:id="rId18"/>
     <p:sldId id="344" r:id="rId19"/>
-    <p:sldId id="347" r:id="rId29"/>
-    <p:sldId id="300" r:id="rId20"/>
+    <p:sldId id="347" r:id="rId20"/>
+    <p:sldId id="300" r:id="rId21"/>
   </p:sldIdLst>
   <p:sldSz cx="12192000" cy="6858000"/>
   <p:notesSz cx="6858000" cy="9144000"/>
   <p:custDataLst>
-    <p:tags r:id="rId23"/>
+    <p:tags r:id="rId24"/>
   </p:custDataLst>
   <p:defaultTextStyle>
     <a:defPPr>
@@ -9270,7 +9270,7 @@
           <a:p>
             <a:fld id="{011DA501-C129-E241-A9DF-ABF70E225816}" type="datetimeFigureOut">
               <a:rPr lang="zh-CN" altLang="en-US"/>
-              <a:t>2026/5/16</a:t>
+              <a:t>2026/5/20</a:t>
             </a:fld>
             <a:endParaRPr kumimoji="1" lang="zh-CN" altLang="en-US"/>
           </a:p>
@@ -9439,7 +9439,7 @@
           <a:p>
             <a:fld id="{0B25AC41-3BEC-9247-8322-91B80C013F2D}" type="datetimeFigureOut">
               <a:rPr lang="en-US" smtClean="0"/>
-              <a:t>5/16/2026</a:t>
+              <a:t>5/20/2026</a:t>
             </a:fld>
             <a:endParaRPr lang="en-US"/>
           </a:p>
@@ -10682,7 +10682,7 @@
           <a:p>
             <a:fld id="{69C3F2ED-74C5-7D4F-8560-0CC253E9A436}" type="slidenum">
               <a:rPr lang="en-US" smtClean="0"/>
-              <a:t>16</a:t>
+              <a:t>17</a:t>
             </a:fld>
             <a:endParaRPr lang="en-US"/>
           </a:p>
@@ -14429,7 +14429,7 @@
           <a:p>
             <a:fld id="{48A87A34-81AB-432B-8DAE-1953F412C126}" type="datetimeFigureOut">
               <a:rPr lang="en-US"/>
-              <a:t>5/16/2026</a:t>
+              <a:t>5/20/2026</a:t>
             </a:fld>
             <a:endParaRPr lang="en-US"/>
           </a:p>
@@ -15805,7 +15805,7 @@
           <a:p>
             <a:fld id="{48A87A34-81AB-432B-8DAE-1953F412C126}" type="datetimeFigureOut">
               <a:rPr lang="en-US" smtClean="0"/>
-              <a:t>5/16/2026</a:t>
+              <a:t>5/20/2026</a:t>
             </a:fld>
             <a:endParaRPr lang="en-US"/>
           </a:p>
@@ -16417,46 +16417,6 @@
                 <a:ea typeface="微软雅黑" panose="020B0503020204020204" pitchFamily="34" charset="-122"/>
               </a:rPr>
               <a:t>运维平台</a:t>
-            </a:r>
-          </a:p>
-        </p:txBody>
-      </p:sp>
-      <p:sp>
-        <p:nvSpPr>
-          <p:cNvPr id="6" name="文本框 5">
-            <a:extLst>
-              <a:ext uri="{FF2B5EF4-FFF2-40B4-BE49-F238E27FC236}">
-                <a16:creationId xmlns:a16="http://schemas.microsoft.com/office/drawing/2014/main" id="{D59A7FC8-F71A-AB05-4E93-5E8BF7B0058F}"/>
-              </a:ext>
-            </a:extLst>
-          </p:cNvPr>
-          <p:cNvSpPr txBox="1"/>
-          <p:nvPr/>
-        </p:nvSpPr>
-        <p:spPr>
-          <a:xfrm>
-            <a:off x="0" y="3423043"/>
-            <a:ext cx="12192000" cy="461665"/>
-          </a:xfrm>
-          <a:prstGeom prst="rect">
-            <a:avLst/>
-          </a:prstGeom>
-          <a:noFill/>
-        </p:spPr>
-        <p:txBody>
-          <a:bodyPr wrap="square">
-            <a:spAutoFit/>
-          </a:bodyPr>
-          <a:lstStyle/>
-          <a:p>
-            <a:pPr algn="ctr"/>
-            <a:r>
-              <a:rPr lang="zh-CN" altLang="en-US" sz="2400" dirty="0">
-                <a:solidFill>
-                  <a:schemeClr val="bg1"/>
-                </a:solidFill>
-              </a:rPr>
-              <a:t>语音驱动，智能闭环</a:t>
             </a:r>
           </a:p>
         </p:txBody>
@@ -18396,10 +18356,7 @@
             </a:r>
           </a:p>
           <a:p>
-            <a:r>
-              <a:rPr sz="1200" b="0"/>
-              <a:t/>
-            </a:r>
+            <a:endParaRPr sz="1200" b="0"/>
           </a:p>
           <a:p>
             <a:r>
@@ -18462,10 +18419,7 @@
             </a:r>
           </a:p>
           <a:p>
-            <a:r>
-              <a:rPr sz="1200" b="0"/>
-              <a:t/>
-            </a:r>
+            <a:endParaRPr sz="1200" b="0"/>
           </a:p>
           <a:p>
             <a:r>
@@ -18492,10 +18446,7 @@
             </a:r>
           </a:p>
           <a:p>
-            <a:r>
-              <a:rPr sz="1200" b="0"/>
-              <a:t/>
-            </a:r>
+            <a:endParaRPr sz="1200" b="0"/>
           </a:p>
           <a:p>
             <a:r>
@@ -22912,10 +22863,7 @@
             </a:r>
           </a:p>
           <a:p>
-            <a:r>
-              <a:rPr sz="1200" b="0"/>
-              <a:t/>
-            </a:r>
+            <a:endParaRPr sz="1200" b="0"/>
           </a:p>
           <a:p>
             <a:r>
@@ -22930,10 +22878,7 @@
             </a:r>
           </a:p>
           <a:p>
-            <a:r>
-              <a:rPr sz="1200" b="0"/>
-              <a:t/>
-            </a:r>
+            <a:endParaRPr sz="1200" b="0"/>
           </a:p>
           <a:p>
             <a:r>
@@ -22948,10 +22893,7 @@
             </a:r>
           </a:p>
           <a:p>
-            <a:r>
-              <a:rPr sz="1200" b="0"/>
-              <a:t/>
-            </a:r>
+            <a:endParaRPr sz="1200" b="0"/>
           </a:p>
           <a:p>
             <a:r>
@@ -22978,10 +22920,7 @@
             </a:r>
           </a:p>
           <a:p>
-            <a:r>
-              <a:rPr sz="1200" b="0"/>
-              <a:t/>
-            </a:r>
+            <a:endParaRPr sz="1200" b="0"/>
           </a:p>
           <a:p>
             <a:r>
@@ -23002,10 +22941,7 @@
             </a:r>
           </a:p>
           <a:p>
-            <a:r>
-              <a:rPr sz="1200" b="0"/>
-              <a:t/>
-            </a:r>
+            <a:endParaRPr sz="1200" b="0"/>
           </a:p>
           <a:p>
             <a:r>
@@ -25430,10 +25366,7 @@
             </a:r>
           </a:p>
           <a:p>
-            <a:r>
-              <a:rPr sz="1100" b="0"/>
-              <a:t/>
-            </a:r>
+            <a:endParaRPr sz="1100" b="0"/>
           </a:p>
           <a:p>
             <a:r>
@@ -25478,10 +25411,7 @@
             </a:r>
           </a:p>
           <a:p>
-            <a:r>
-              <a:rPr sz="1100" b="0"/>
-              <a:t/>
-            </a:r>
+            <a:endParaRPr sz="1100" b="0"/>
           </a:p>
           <a:p>
             <a:r>
@@ -25520,10 +25450,7 @@
             </a:r>
           </a:p>
           <a:p>
-            <a:r>
-              <a:rPr sz="1100" b="0"/>
-              <a:t/>
-            </a:r>
+            <a:endParaRPr sz="1100" b="0"/>
           </a:p>
           <a:p>
             <a:r>
@@ -25585,10 +25512,7 @@
             </a:r>
           </a:p>
           <a:p>
-            <a:r>
-              <a:rPr sz="1100" b="0"/>
-              <a:t/>
-            </a:r>
+            <a:endParaRPr sz="1100" b="0"/>
           </a:p>
           <a:p>
             <a:r>
@@ -25609,10 +25533,7 @@
             </a:r>
           </a:p>
           <a:p>
-            <a:r>
-              <a:rPr sz="1100" b="0"/>
-              <a:t/>
-            </a:r>
+            <a:endParaRPr sz="1100" b="0"/>
           </a:p>
           <a:p>
             <a:r>
@@ -25645,10 +25566,7 @@
             </a:r>
           </a:p>
           <a:p>
-            <a:r>
-              <a:rPr sz="1100" b="0"/>
-              <a:t/>
-            </a:r>
+            <a:endParaRPr sz="1100" b="0"/>
           </a:p>
           <a:p>
             <a:r>
@@ -25669,10 +25587,7 @@
             </a:r>
           </a:p>
           <a:p>
-            <a:r>
-              <a:rPr sz="1100" b="0"/>
-              <a:t/>
-            </a:r>
+            <a:endParaRPr sz="1100" b="0"/>
           </a:p>
           <a:p>
             <a:r>
@@ -25699,10 +25614,7 @@
             </a:r>
           </a:p>
           <a:p>
-            <a:r>
-              <a:rPr sz="1100" b="0"/>
-              <a:t/>
-            </a:r>
+            <a:endParaRPr sz="1100" b="0"/>
           </a:p>
           <a:p>
             <a:r>
@@ -28871,10 +28783,7 @@
             </a:r>
           </a:p>
           <a:p>
-            <a:r>
-              <a:rPr sz="1100" b="0"/>
-              <a:t/>
-            </a:r>
+            <a:endParaRPr sz="1100" b="0"/>
           </a:p>
           <a:p>
             <a:r>
@@ -28943,10 +28852,7 @@
             </a:r>
           </a:p>
           <a:p>
-            <a:r>
-              <a:rPr sz="1100" b="0"/>
-              <a:t/>
-            </a:r>
+            <a:endParaRPr sz="1100" b="0"/>
           </a:p>
           <a:p>
             <a:r>
@@ -28985,10 +28891,7 @@
             </a:r>
           </a:p>
           <a:p>
-            <a:r>
-              <a:rPr sz="1100" b="0"/>
-              <a:t/>
-            </a:r>
+            <a:endParaRPr sz="1100" b="0"/>
           </a:p>
           <a:p>
             <a:r>
@@ -31416,10 +31319,7 @@
             </a:r>
           </a:p>
           <a:p>
-            <a:r>
-              <a:rPr sz="1200" b="0"/>
-              <a:t/>
-            </a:r>
+            <a:endParaRPr sz="1200" b="0"/>
           </a:p>
           <a:p>
             <a:r>
@@ -31518,10 +31418,7 @@
             </a:r>
           </a:p>
           <a:p>
-            <a:r>
-              <a:rPr sz="1200" b="0"/>
-              <a:t/>
-            </a:r>
+            <a:endParaRPr sz="1200" b="0"/>
           </a:p>
           <a:p>
             <a:r>
@@ -31545,7 +31442,7 @@
 </file>
 
 <file path=ppt/slides/slide16.xml><?xml version="1.0" encoding="utf-8"?>
-<p:sld xmlns:a="http://schemas.openxmlformats.org/drawingml/2006/main" xmlns:p="http://schemas.openxmlformats.org/presentationml/2006/main" xmlns:r="http://schemas.openxmlformats.org/officeDocument/2006/relationships">
+<p:sld xmlns:a="http://schemas.openxmlformats.org/drawingml/2006/main" xmlns:r="http://schemas.openxmlformats.org/officeDocument/2006/relationships" xmlns:p="http://schemas.openxmlformats.org/presentationml/2006/main">
   <p:cSld>
     <p:spTree>
       <p:nvGrpSpPr>
@@ -31553,7 +31450,14 @@
         <p:cNvGrpSpPr/>
         <p:nvPr/>
       </p:nvGrpSpPr>
-      <p:grpSpPr/>
+      <p:grpSpPr>
+        <a:xfrm>
+          <a:off x="0" y="0"/>
+          <a:ext cx="0" cy="0"/>
+          <a:chOff x="0" y="0"/>
+          <a:chExt cx="0" cy="0"/>
+        </a:xfrm>
+      </p:grpSpPr>
       <p:sp>
         <p:nvSpPr>
           <p:cNvPr id="2" name="Title 1"/>
@@ -31650,7 +31554,9 @@
               <a:t>• 自带 Operator Portal、Custom Skills、Code Indexing</a:t>
             </a:r>
           </a:p>
-          <a:p/>
+          <a:p>
+            <a:endParaRPr sz="1300" b="0"/>
+          </a:p>
           <a:p>
             <a:r>
               <a:rPr sz="1600" b="1"/>
@@ -31740,7 +31646,9 @@
               <a:t>⑤ 客户专属 MCP — 把客户内部工具暴露给 DevOps Agent</a:t>
             </a:r>
           </a:p>
-          <a:p/>
+          <a:p>
+            <a:endParaRPr sz="1300" b="0"/>
+          </a:p>
           <a:p>
             <a:r>
               <a:rPr sz="1600" b="1"/>
@@ -31765,7 +31673,9 @@
               <a:t>• Unified Operations 抵扣后  ~$370 (仅 Bedrock+Sonic)</a:t>
             </a:r>
           </a:p>
-          <a:p/>
+          <a:p>
+            <a:endParaRPr sz="1300" b="0"/>
+          </a:p>
           <a:p>
             <a:r>
               <a:rPr sz="1600" b="1"/>
@@ -32985,10 +32895,7 @@
             </a:r>
           </a:p>
           <a:p>
-            <a:r>
-              <a:rPr sz="1200" b="0"/>
-              <a:t/>
-            </a:r>
+            <a:endParaRPr sz="1200" b="0"/>
           </a:p>
           <a:p>
             <a:r>
@@ -33015,10 +32922,7 @@
             </a:r>
           </a:p>
           <a:p>
-            <a:r>
-              <a:rPr sz="1200" b="0"/>
-              <a:t/>
-            </a:r>
+            <a:endParaRPr sz="1200" b="0"/>
           </a:p>
           <a:p>
             <a:r>
@@ -44921,10 +44825,7 @@
             </a:r>
           </a:p>
           <a:p>
-            <a:r>
-              <a:rPr sz="1200" b="0"/>
-              <a:t/>
-            </a:r>
+            <a:endParaRPr sz="1200" b="0"/>
           </a:p>
           <a:p>
             <a:r>
@@ -44951,10 +44852,7 @@
             </a:r>
           </a:p>
           <a:p>
-            <a:r>
-              <a:rPr sz="1200" b="0"/>
-              <a:t/>
-            </a:r>
+            <a:endParaRPr sz="1200" b="0"/>
           </a:p>
           <a:p>
             <a:r>
@@ -45022,10 +44920,7 @@
             </a:r>
           </a:p>
           <a:p>
-            <a:r>
-              <a:rPr sz="1200" b="0"/>
-              <a:t/>
-            </a:r>
+            <a:endParaRPr sz="1200" b="0"/>
           </a:p>
           <a:p>
             <a:r>
@@ -45094,10 +44989,7 @@
             </a:r>
           </a:p>
           <a:p>
-            <a:r>
-              <a:rPr sz="1200" b="0"/>
-              <a:t/>
-            </a:r>
+            <a:endParaRPr sz="1200" b="0"/>
           </a:p>
           <a:p>
             <a:r>
@@ -45991,6 +45883,21 @@
 </file>
 
 <file path=customXml/item1.xml><?xml version="1.0" encoding="utf-8"?>
+<?mso-contentType ?>
+<FormTemplates xmlns="http://schemas.microsoft.com/sharepoint/v3/contenttype/forms">
+  <Display>DocumentLibraryForm</Display>
+  <Edit>DocumentLibraryForm</Edit>
+  <New>DocumentLibraryForm</New>
+</FormTemplates>
+</file>
+
+<file path=customXml/item2.xml><?xml version="1.0" encoding="utf-8"?>
+<p:properties xmlns:p="http://schemas.microsoft.com/office/2006/metadata/properties" xmlns:xsi="http://www.w3.org/2001/XMLSchema-instance">
+  <documentManagement/>
+</p:properties>
+</file>
+
+<file path=customXml/item3.xml><?xml version="1.0" encoding="utf-8"?>
 <ct:contentTypeSchema xmlns:ct="http://schemas.microsoft.com/office/2006/metadata/contentType" xmlns:ma="http://schemas.microsoft.com/office/2006/metadata/properties/metaAttributes" ma:contentTypeDescription="新建文档。" ma:contentTypeVersion="7" ct:_="" ma:_="" ma:contentTypeScope="" ma:contentTypeID="0x010100407B8FF655CFD44B9A48FC292CD07551" ma:contentTypeName="文档" ma:versionID="b8a686a88e6a4bb569981f7aa16d89c8">
   <xsd:schema xmlns:p="http://schemas.microsoft.com/office/2006/metadata/properties" xmlns:xsd="http://www.w3.org/2001/XMLSchema" xmlns:ns2="855133d1-b6bd-46d5-87d4-428d7c908dc0" xmlns:xs="http://www.w3.org/2001/XMLSchema" ns2:_="" ma:root="true" ma:fieldsID="b53007261b0e13e84f0647679aebf433" targetNamespace="http://schemas.microsoft.com/office/2006/metadata/properties">
     <xsd:import namespace="855133d1-b6bd-46d5-87d4-428d7c908dc0"/>
@@ -46152,23 +46059,8 @@
 </ct:contentTypeSchema>
 </file>
 
-<file path=customXml/item2.xml><?xml version="1.0" encoding="utf-8"?>
-<p:properties xmlns:p="http://schemas.microsoft.com/office/2006/metadata/properties" xmlns:xsi="http://www.w3.org/2001/XMLSchema-instance">
-  <documentManagement/>
-</p:properties>
-</file>
-
-<file path=customXml/item3.xml><?xml version="1.0" encoding="utf-8"?>
-<?mso-contentType ?>
-<FormTemplates xmlns="http://schemas.microsoft.com/sharepoint/v3/contenttype/forms">
-  <Display>DocumentLibraryForm</Display>
-  <Edit>DocumentLibraryForm</Edit>
-  <New>DocumentLibraryForm</New>
-</FormTemplates>
-</file>
-
 <file path=customXml/itemProps1.xml><?xml version="1.0" encoding="utf-8"?>
-<ds:datastoreItem xmlns:ds="http://schemas.openxmlformats.org/officeDocument/2006/customXml" ds:itemID="{BA854933-773D-432F-AA20-17551E849917}">
+<ds:datastoreItem xmlns:ds="http://schemas.openxmlformats.org/officeDocument/2006/customXml" ds:itemID="{705B35A6-8B52-46A5-AE45-B98C6459DC10}">
   <ds:schemaRefs/>
 </ds:datastoreItem>
 </file>
@@ -46190,7 +46082,7 @@
 </file>
 
 <file path=customXml/itemProps3.xml><?xml version="1.0" encoding="utf-8"?>
-<ds:datastoreItem xmlns:ds="http://schemas.openxmlformats.org/officeDocument/2006/customXml" ds:itemID="{705B35A6-8B52-46A5-AE45-B98C6459DC10}">
+<ds:datastoreItem xmlns:ds="http://schemas.openxmlformats.org/officeDocument/2006/customXml" ds:itemID="{BA854933-773D-432F-AA20-17551E849917}">
   <ds:schemaRefs/>
 </ds:datastoreItem>
 </file>